--- a/template.pptx
+++ b/template.pptx
@@ -197,7 +197,7 @@
           <a:p>
             <a:fld id="{17E1D49D-48C3-4654-940B-94FADE24DBDF}" type="datetimeFigureOut">
               <a:rPr lang="ko-KR" altLang="en-US" smtClean="0"/>
-              <a:t>2025-05-13</a:t>
+              <a:t>2025-05-28</a:t>
             </a:fld>
             <a:endParaRPr lang="ko-KR" altLang="en-US"/>
           </a:p>
@@ -779,7 +779,7 @@
           <a:p>
             <a:fld id="{502CD248-AE16-47FA-AF5A-2F10FD8A8207}" type="datetimeFigureOut">
               <a:rPr lang="ko-KR" altLang="en-US" smtClean="0"/>
-              <a:t>2025-05-13</a:t>
+              <a:t>2025-05-28</a:t>
             </a:fld>
             <a:endParaRPr lang="ko-KR" altLang="en-US"/>
           </a:p>
@@ -977,7 +977,7 @@
           <a:p>
             <a:fld id="{502CD248-AE16-47FA-AF5A-2F10FD8A8207}" type="datetimeFigureOut">
               <a:rPr lang="ko-KR" altLang="en-US" smtClean="0"/>
-              <a:t>2025-05-13</a:t>
+              <a:t>2025-05-28</a:t>
             </a:fld>
             <a:endParaRPr lang="ko-KR" altLang="en-US"/>
           </a:p>
@@ -1185,7 +1185,7 @@
           <a:p>
             <a:fld id="{502CD248-AE16-47FA-AF5A-2F10FD8A8207}" type="datetimeFigureOut">
               <a:rPr lang="ko-KR" altLang="en-US" smtClean="0"/>
-              <a:t>2025-05-13</a:t>
+              <a:t>2025-05-28</a:t>
             </a:fld>
             <a:endParaRPr lang="ko-KR" altLang="en-US"/>
           </a:p>
@@ -1383,7 +1383,7 @@
           <a:p>
             <a:fld id="{502CD248-AE16-47FA-AF5A-2F10FD8A8207}" type="datetimeFigureOut">
               <a:rPr lang="ko-KR" altLang="en-US" smtClean="0"/>
-              <a:t>2025-05-13</a:t>
+              <a:t>2025-05-28</a:t>
             </a:fld>
             <a:endParaRPr lang="ko-KR" altLang="en-US"/>
           </a:p>
@@ -1658,7 +1658,7 @@
           <a:p>
             <a:fld id="{502CD248-AE16-47FA-AF5A-2F10FD8A8207}" type="datetimeFigureOut">
               <a:rPr lang="ko-KR" altLang="en-US" smtClean="0"/>
-              <a:t>2025-05-13</a:t>
+              <a:t>2025-05-28</a:t>
             </a:fld>
             <a:endParaRPr lang="ko-KR" altLang="en-US"/>
           </a:p>
@@ -1923,7 +1923,7 @@
           <a:p>
             <a:fld id="{502CD248-AE16-47FA-AF5A-2F10FD8A8207}" type="datetimeFigureOut">
               <a:rPr lang="ko-KR" altLang="en-US" smtClean="0"/>
-              <a:t>2025-05-13</a:t>
+              <a:t>2025-05-28</a:t>
             </a:fld>
             <a:endParaRPr lang="ko-KR" altLang="en-US"/>
           </a:p>
@@ -2335,7 +2335,7 @@
           <a:p>
             <a:fld id="{502CD248-AE16-47FA-AF5A-2F10FD8A8207}" type="datetimeFigureOut">
               <a:rPr lang="ko-KR" altLang="en-US" smtClean="0"/>
-              <a:t>2025-05-13</a:t>
+              <a:t>2025-05-28</a:t>
             </a:fld>
             <a:endParaRPr lang="ko-KR" altLang="en-US"/>
           </a:p>
@@ -2476,7 +2476,7 @@
           <a:p>
             <a:fld id="{502CD248-AE16-47FA-AF5A-2F10FD8A8207}" type="datetimeFigureOut">
               <a:rPr lang="ko-KR" altLang="en-US" smtClean="0"/>
-              <a:t>2025-05-13</a:t>
+              <a:t>2025-05-28</a:t>
             </a:fld>
             <a:endParaRPr lang="ko-KR" altLang="en-US"/>
           </a:p>
@@ -2589,7 +2589,7 @@
           <a:p>
             <a:fld id="{502CD248-AE16-47FA-AF5A-2F10FD8A8207}" type="datetimeFigureOut">
               <a:rPr lang="ko-KR" altLang="en-US" smtClean="0"/>
-              <a:t>2025-05-13</a:t>
+              <a:t>2025-05-28</a:t>
             </a:fld>
             <a:endParaRPr lang="ko-KR" altLang="en-US"/>
           </a:p>
@@ -2900,7 +2900,7 @@
           <a:p>
             <a:fld id="{502CD248-AE16-47FA-AF5A-2F10FD8A8207}" type="datetimeFigureOut">
               <a:rPr lang="ko-KR" altLang="en-US" smtClean="0"/>
-              <a:t>2025-05-13</a:t>
+              <a:t>2025-05-28</a:t>
             </a:fld>
             <a:endParaRPr lang="ko-KR" altLang="en-US"/>
           </a:p>
@@ -3188,7 +3188,7 @@
           <a:p>
             <a:fld id="{502CD248-AE16-47FA-AF5A-2F10FD8A8207}" type="datetimeFigureOut">
               <a:rPr lang="ko-KR" altLang="en-US" smtClean="0"/>
-              <a:t>2025-05-13</a:t>
+              <a:t>2025-05-28</a:t>
             </a:fld>
             <a:endParaRPr lang="ko-KR" altLang="en-US"/>
           </a:p>
@@ -3429,7 +3429,7 @@
           <a:p>
             <a:fld id="{502CD248-AE16-47FA-AF5A-2F10FD8A8207}" type="datetimeFigureOut">
               <a:rPr lang="ko-KR" altLang="en-US" smtClean="0"/>
-              <a:t>2025-05-13</a:t>
+              <a:t>2025-05-28</a:t>
             </a:fld>
             <a:endParaRPr lang="ko-KR" altLang="en-US"/>
           </a:p>
@@ -3933,101 +3933,6 @@
               <a:latin typeface="맑은 고딕" panose="020F0502020204030204"/>
               <a:ea typeface="맑은 고딕" panose="020B0503020000020004" pitchFamily="50" charset="-127"/>
               <a:cs typeface="+mn-cs"/>
-            </a:endParaRPr>
-          </a:p>
-        </p:txBody>
-      </p:sp>
-      <p:sp>
-        <p:nvSpPr>
-          <p:cNvPr id="2" name="TextBox 1">
-            <a:extLst>
-              <a:ext uri="{FF2B5EF4-FFF2-40B4-BE49-F238E27FC236}">
-                <a16:creationId xmlns:a16="http://schemas.microsoft.com/office/drawing/2014/main" id="{65513087-15F0-C997-CEA0-E85050A590DB}"/>
-              </a:ext>
-            </a:extLst>
-          </p:cNvPr>
-          <p:cNvSpPr txBox="1"/>
-          <p:nvPr/>
-        </p:nvSpPr>
-        <p:spPr>
-          <a:xfrm>
-            <a:off x="4606905" y="414536"/>
-            <a:ext cx="7246825" cy="611899"/>
-          </a:xfrm>
-          <a:prstGeom prst="rect">
-            <a:avLst/>
-          </a:prstGeom>
-          <a:noFill/>
-        </p:spPr>
-        <p:txBody>
-          <a:bodyPr wrap="square" rtlCol="0">
-            <a:spAutoFit/>
-          </a:bodyPr>
-          <a:lstStyle/>
-          <a:p>
-            <a:pPr marL="358775" marR="0" lvl="0" indent="-358775" algn="l" defTabSz="914332" rtl="0" eaLnBrk="1" fontAlgn="auto" latinLnBrk="0" hangingPunct="1">
-              <a:lnSpc>
-                <a:spcPct val="130000"/>
-              </a:lnSpc>
-              <a:spcBef>
-                <a:spcPts val="800"/>
-              </a:spcBef>
-              <a:spcAft>
-                <a:spcPts val="0"/>
-              </a:spcAft>
-              <a:buClrTx/>
-              <a:buSzTx/>
-              <a:buFontTx/>
-              <a:buNone/>
-              <a:tabLst/>
-              <a:defRPr/>
-            </a:pPr>
-            <a:r>
-              <a:rPr lang="ko-KR" altLang="en-US" sz="2800" dirty="0">
-                <a:solidFill>
-                  <a:srgbClr val="213337"/>
-                </a:solidFill>
-                <a:latin typeface="나눔스퀘어 네오 Bold" panose="00000800000000000000" pitchFamily="2" charset="-127"/>
-                <a:ea typeface="나눔스퀘어 네오 Bold" panose="00000800000000000000" pitchFamily="2" charset="-127"/>
-              </a:rPr>
-              <a:t>구절 본문</a:t>
-            </a:r>
-            <a:r>
-              <a:rPr lang="en-US" altLang="ko-KR" sz="2800" dirty="0">
-                <a:solidFill>
-                  <a:srgbClr val="213337"/>
-                </a:solidFill>
-                <a:latin typeface="나눔스퀘어 네오 Bold" panose="00000800000000000000" pitchFamily="2" charset="-127"/>
-                <a:ea typeface="나눔스퀘어 네오 Bold" panose="00000800000000000000" pitchFamily="2" charset="-127"/>
-              </a:rPr>
-              <a:t>(</a:t>
-            </a:r>
-            <a:r>
-              <a:rPr lang="ko-KR" altLang="en-US" sz="2800" dirty="0">
-                <a:solidFill>
-                  <a:srgbClr val="213337"/>
-                </a:solidFill>
-                <a:latin typeface="나눔스퀘어 네오 Bold" panose="00000800000000000000" pitchFamily="2" charset="-127"/>
-                <a:ea typeface="나눔스퀘어 네오 Bold" panose="00000800000000000000" pitchFamily="2" charset="-127"/>
-              </a:rPr>
-              <a:t>한</a:t>
-            </a:r>
-            <a:r>
-              <a:rPr lang="en-US" altLang="ko-KR" sz="2800" dirty="0">
-                <a:solidFill>
-                  <a:srgbClr val="213337"/>
-                </a:solidFill>
-                <a:latin typeface="나눔스퀘어 네오 Bold" panose="00000800000000000000" pitchFamily="2" charset="-127"/>
-                <a:ea typeface="나눔스퀘어 네오 Bold" panose="00000800000000000000" pitchFamily="2" charset="-127"/>
-              </a:rPr>
-              <a:t>)</a:t>
-            </a:r>
-            <a:endParaRPr lang="ko-KR" altLang="en-US" sz="2800" dirty="0">
-              <a:solidFill>
-                <a:srgbClr val="213337"/>
-              </a:solidFill>
-              <a:latin typeface="나눔스퀘어 네오 Bold" panose="00000800000000000000" pitchFamily="2" charset="-127"/>
-              <a:ea typeface="나눔스퀘어 네오 Bold" panose="00000800000000000000" pitchFamily="2" charset="-127"/>
             </a:endParaRPr>
           </a:p>
         </p:txBody>
@@ -5482,6 +5387,41 @@
               <a:ea typeface="Pretendard Variable" panose="02000003000000020004" pitchFamily="2" charset="-127"/>
               <a:cs typeface="Pretendard Variable" panose="02000003000000020004" pitchFamily="2" charset="-127"/>
             </a:endParaRPr>
+          </a:p>
+        </p:txBody>
+      </p:sp>
+      <p:sp>
+        <p:nvSpPr>
+          <p:cNvPr id="5" name="TextBox 4">
+            <a:extLst>
+              <a:ext uri="{FF2B5EF4-FFF2-40B4-BE49-F238E27FC236}">
+                <a16:creationId xmlns:a16="http://schemas.microsoft.com/office/drawing/2014/main" id="{66F56BDC-842A-F82D-62A9-29DCB99DBEEB}"/>
+              </a:ext>
+            </a:extLst>
+          </p:cNvPr>
+          <p:cNvSpPr txBox="1"/>
+          <p:nvPr/>
+        </p:nvSpPr>
+        <p:spPr>
+          <a:xfrm>
+            <a:off x="4606904" y="414536"/>
+            <a:ext cx="7246825" cy="369332"/>
+          </a:xfrm>
+          <a:prstGeom prst="rect">
+            <a:avLst/>
+          </a:prstGeom>
+          <a:noFill/>
+        </p:spPr>
+        <p:txBody>
+          <a:bodyPr wrap="square" rtlCol="0">
+            <a:spAutoFit/>
+          </a:bodyPr>
+          <a:lstStyle/>
+          <a:p>
+            <a:r>
+              <a:rPr lang="ko-KR" altLang="en-US" dirty="0"/>
+              <a:t>동해물과 백두산이</a:t>
+            </a:r>
           </a:p>
         </p:txBody>
       </p:sp>

--- a/template.pptx
+++ b/template.pptx
@@ -197,7 +197,7 @@
           <a:p>
             <a:fld id="{17E1D49D-48C3-4654-940B-94FADE24DBDF}" type="datetimeFigureOut">
               <a:rPr lang="ko-KR" altLang="en-US" smtClean="0"/>
-              <a:t>2025-05-28</a:t>
+              <a:t>2025-06-01</a:t>
             </a:fld>
             <a:endParaRPr lang="ko-KR" altLang="en-US"/>
           </a:p>
@@ -779,7 +779,7 @@
           <a:p>
             <a:fld id="{502CD248-AE16-47FA-AF5A-2F10FD8A8207}" type="datetimeFigureOut">
               <a:rPr lang="ko-KR" altLang="en-US" smtClean="0"/>
-              <a:t>2025-05-28</a:t>
+              <a:t>2025-06-01</a:t>
             </a:fld>
             <a:endParaRPr lang="ko-KR" altLang="en-US"/>
           </a:p>
@@ -977,7 +977,7 @@
           <a:p>
             <a:fld id="{502CD248-AE16-47FA-AF5A-2F10FD8A8207}" type="datetimeFigureOut">
               <a:rPr lang="ko-KR" altLang="en-US" smtClean="0"/>
-              <a:t>2025-05-28</a:t>
+              <a:t>2025-06-01</a:t>
             </a:fld>
             <a:endParaRPr lang="ko-KR" altLang="en-US"/>
           </a:p>
@@ -1185,7 +1185,7 @@
           <a:p>
             <a:fld id="{502CD248-AE16-47FA-AF5A-2F10FD8A8207}" type="datetimeFigureOut">
               <a:rPr lang="ko-KR" altLang="en-US" smtClean="0"/>
-              <a:t>2025-05-28</a:t>
+              <a:t>2025-06-01</a:t>
             </a:fld>
             <a:endParaRPr lang="ko-KR" altLang="en-US"/>
           </a:p>
@@ -1383,7 +1383,7 @@
           <a:p>
             <a:fld id="{502CD248-AE16-47FA-AF5A-2F10FD8A8207}" type="datetimeFigureOut">
               <a:rPr lang="ko-KR" altLang="en-US" smtClean="0"/>
-              <a:t>2025-05-28</a:t>
+              <a:t>2025-06-01</a:t>
             </a:fld>
             <a:endParaRPr lang="ko-KR" altLang="en-US"/>
           </a:p>
@@ -1658,7 +1658,7 @@
           <a:p>
             <a:fld id="{502CD248-AE16-47FA-AF5A-2F10FD8A8207}" type="datetimeFigureOut">
               <a:rPr lang="ko-KR" altLang="en-US" smtClean="0"/>
-              <a:t>2025-05-28</a:t>
+              <a:t>2025-06-01</a:t>
             </a:fld>
             <a:endParaRPr lang="ko-KR" altLang="en-US"/>
           </a:p>
@@ -1923,7 +1923,7 @@
           <a:p>
             <a:fld id="{502CD248-AE16-47FA-AF5A-2F10FD8A8207}" type="datetimeFigureOut">
               <a:rPr lang="ko-KR" altLang="en-US" smtClean="0"/>
-              <a:t>2025-05-28</a:t>
+              <a:t>2025-06-01</a:t>
             </a:fld>
             <a:endParaRPr lang="ko-KR" altLang="en-US"/>
           </a:p>
@@ -2335,7 +2335,7 @@
           <a:p>
             <a:fld id="{502CD248-AE16-47FA-AF5A-2F10FD8A8207}" type="datetimeFigureOut">
               <a:rPr lang="ko-KR" altLang="en-US" smtClean="0"/>
-              <a:t>2025-05-28</a:t>
+              <a:t>2025-06-01</a:t>
             </a:fld>
             <a:endParaRPr lang="ko-KR" altLang="en-US"/>
           </a:p>
@@ -2476,7 +2476,7 @@
           <a:p>
             <a:fld id="{502CD248-AE16-47FA-AF5A-2F10FD8A8207}" type="datetimeFigureOut">
               <a:rPr lang="ko-KR" altLang="en-US" smtClean="0"/>
-              <a:t>2025-05-28</a:t>
+              <a:t>2025-06-01</a:t>
             </a:fld>
             <a:endParaRPr lang="ko-KR" altLang="en-US"/>
           </a:p>
@@ -2589,7 +2589,7 @@
           <a:p>
             <a:fld id="{502CD248-AE16-47FA-AF5A-2F10FD8A8207}" type="datetimeFigureOut">
               <a:rPr lang="ko-KR" altLang="en-US" smtClean="0"/>
-              <a:t>2025-05-28</a:t>
+              <a:t>2025-06-01</a:t>
             </a:fld>
             <a:endParaRPr lang="ko-KR" altLang="en-US"/>
           </a:p>
@@ -2900,7 +2900,7 @@
           <a:p>
             <a:fld id="{502CD248-AE16-47FA-AF5A-2F10FD8A8207}" type="datetimeFigureOut">
               <a:rPr lang="ko-KR" altLang="en-US" smtClean="0"/>
-              <a:t>2025-05-28</a:t>
+              <a:t>2025-06-01</a:t>
             </a:fld>
             <a:endParaRPr lang="ko-KR" altLang="en-US"/>
           </a:p>
@@ -3188,7 +3188,7 @@
           <a:p>
             <a:fld id="{502CD248-AE16-47FA-AF5A-2F10FD8A8207}" type="datetimeFigureOut">
               <a:rPr lang="ko-KR" altLang="en-US" smtClean="0"/>
-              <a:t>2025-05-28</a:t>
+              <a:t>2025-06-01</a:t>
             </a:fld>
             <a:endParaRPr lang="ko-KR" altLang="en-US"/>
           </a:p>
@@ -3429,7 +3429,7 @@
           <a:p>
             <a:fld id="{502CD248-AE16-47FA-AF5A-2F10FD8A8207}" type="datetimeFigureOut">
               <a:rPr lang="ko-KR" altLang="en-US" smtClean="0"/>
-              <a:t>2025-05-28</a:t>
+              <a:t>2025-06-01</a:t>
             </a:fld>
             <a:endParaRPr lang="ko-KR" altLang="en-US"/>
           </a:p>
@@ -5292,106 +5292,6 @@
       </p:sp>
       <p:sp>
         <p:nvSpPr>
-          <p:cNvPr id="7" name="TextBox 6">
-            <a:extLst>
-              <a:ext uri="{FF2B5EF4-FFF2-40B4-BE49-F238E27FC236}">
-                <a16:creationId xmlns:a16="http://schemas.microsoft.com/office/drawing/2014/main" id="{266B928D-7585-5FC7-D3E6-3A704ADD94B4}"/>
-              </a:ext>
-            </a:extLst>
-          </p:cNvPr>
-          <p:cNvSpPr txBox="1"/>
-          <p:nvPr/>
-        </p:nvSpPr>
-        <p:spPr>
-          <a:xfrm>
-            <a:off x="4606904" y="2931765"/>
-            <a:ext cx="7246825" cy="448328"/>
-          </a:xfrm>
-          <a:prstGeom prst="rect">
-            <a:avLst/>
-          </a:prstGeom>
-          <a:noFill/>
-        </p:spPr>
-        <p:txBody>
-          <a:bodyPr wrap="square" rtlCol="0">
-            <a:spAutoFit/>
-          </a:bodyPr>
-          <a:lstStyle/>
-          <a:p>
-            <a:pPr marL="360000" marR="0" lvl="0" indent="-360000" algn="l" defTabSz="914332" rtl="0" eaLnBrk="1" fontAlgn="auto" latinLnBrk="0" hangingPunct="1">
-              <a:lnSpc>
-                <a:spcPct val="130000"/>
-              </a:lnSpc>
-              <a:spcBef>
-                <a:spcPts val="800"/>
-              </a:spcBef>
-              <a:spcAft>
-                <a:spcPts val="0"/>
-              </a:spcAft>
-              <a:buClrTx/>
-              <a:buSzTx/>
-              <a:buFontTx/>
-              <a:buNone/>
-              <a:tabLst/>
-              <a:defRPr/>
-            </a:pPr>
-            <a:r>
-              <a:rPr lang="ko-KR" altLang="en-US" sz="2000" baseline="30000" dirty="0">
-                <a:solidFill>
-                  <a:srgbClr val="4F655E"/>
-                </a:solidFill>
-                <a:latin typeface="Pretendard Variable" panose="02000003000000020004" pitchFamily="2" charset="-127"/>
-                <a:ea typeface="Pretendard Variable" panose="02000003000000020004" pitchFamily="2" charset="-127"/>
-                <a:cs typeface="Pretendard Variable" panose="02000003000000020004" pitchFamily="2" charset="-127"/>
-              </a:rPr>
-              <a:t>구절 본문</a:t>
-            </a:r>
-            <a:r>
-              <a:rPr lang="en-US" altLang="ko-KR" sz="2000" baseline="30000" dirty="0">
-                <a:solidFill>
-                  <a:srgbClr val="4F655E"/>
-                </a:solidFill>
-                <a:latin typeface="Pretendard Variable" panose="02000003000000020004" pitchFamily="2" charset="-127"/>
-                <a:ea typeface="Pretendard Variable" panose="02000003000000020004" pitchFamily="2" charset="-127"/>
-                <a:cs typeface="Pretendard Variable" panose="02000003000000020004" pitchFamily="2" charset="-127"/>
-              </a:rPr>
-              <a:t>(</a:t>
-            </a:r>
-            <a:r>
-              <a:rPr lang="ko-KR" altLang="en-US" sz="2000" baseline="30000" dirty="0">
-                <a:solidFill>
-                  <a:srgbClr val="4F655E"/>
-                </a:solidFill>
-                <a:latin typeface="Pretendard Variable" panose="02000003000000020004" pitchFamily="2" charset="-127"/>
-                <a:ea typeface="Pretendard Variable" panose="02000003000000020004" pitchFamily="2" charset="-127"/>
-                <a:cs typeface="Pretendard Variable" panose="02000003000000020004" pitchFamily="2" charset="-127"/>
-              </a:rPr>
-              <a:t>영</a:t>
-            </a:r>
-            <a:r>
-              <a:rPr lang="en-US" altLang="ko-KR" sz="2000" baseline="30000" dirty="0">
-                <a:solidFill>
-                  <a:srgbClr val="4F655E"/>
-                </a:solidFill>
-                <a:latin typeface="Pretendard Variable" panose="02000003000000020004" pitchFamily="2" charset="-127"/>
-                <a:ea typeface="Pretendard Variable" panose="02000003000000020004" pitchFamily="2" charset="-127"/>
-                <a:cs typeface="Pretendard Variable" panose="02000003000000020004" pitchFamily="2" charset="-127"/>
-              </a:rPr>
-              <a:t>)</a:t>
-            </a:r>
-            <a:endParaRPr lang="en-US" altLang="ko-KR" sz="2000" dirty="0">
-              <a:solidFill>
-                <a:srgbClr val="4F655E"/>
-              </a:solidFill>
-              <a:latin typeface="Pretendard Variable" panose="02000003000000020004" pitchFamily="2" charset="-127"/>
-              <a:ea typeface="Pretendard Variable" panose="02000003000000020004" pitchFamily="2" charset="-127"/>
-              <a:cs typeface="Pretendard Variable" panose="02000003000000020004" pitchFamily="2" charset="-127"/>
-            </a:endParaRPr>
-          </a:p>
-        </p:txBody>
-      </p:sp>
-      <p:sp>
-        <p:nvSpPr>
           <p:cNvPr id="5" name="TextBox 4">
             <a:extLst>
               <a:ext uri="{FF2B5EF4-FFF2-40B4-BE49-F238E27FC236}">
@@ -5422,6 +5322,42 @@
               <a:rPr lang="ko-KR" altLang="en-US" dirty="0"/>
               <a:t>동해물과 백두산이</a:t>
             </a:r>
+          </a:p>
+        </p:txBody>
+      </p:sp>
+      <p:sp>
+        <p:nvSpPr>
+          <p:cNvPr id="3" name="TextBox 2">
+            <a:extLst>
+              <a:ext uri="{FF2B5EF4-FFF2-40B4-BE49-F238E27FC236}">
+                <a16:creationId xmlns:a16="http://schemas.microsoft.com/office/drawing/2014/main" id="{9992D8C0-60E8-B6D2-A388-9B378A00EBBC}"/>
+              </a:ext>
+            </a:extLst>
+          </p:cNvPr>
+          <p:cNvSpPr txBox="1"/>
+          <p:nvPr/>
+        </p:nvSpPr>
+        <p:spPr>
+          <a:xfrm>
+            <a:off x="4606904" y="3088441"/>
+            <a:ext cx="7246821" cy="369332"/>
+          </a:xfrm>
+          <a:prstGeom prst="rect">
+            <a:avLst/>
+          </a:prstGeom>
+          <a:noFill/>
+        </p:spPr>
+        <p:txBody>
+          <a:bodyPr wrap="square" rtlCol="0">
+            <a:spAutoFit/>
+          </a:bodyPr>
+          <a:lstStyle/>
+          <a:p>
+            <a:r>
+              <a:rPr lang="en-US" altLang="ko-KR" dirty="0"/>
+              <a:t>ABC</a:t>
+            </a:r>
+            <a:endParaRPr lang="ko-KR" altLang="en-US" dirty="0"/>
           </a:p>
         </p:txBody>
       </p:sp>

--- a/template.pptx
+++ b/template.pptx
@@ -197,7 +197,7 @@
           <a:p>
             <a:fld id="{17E1D49D-48C3-4654-940B-94FADE24DBDF}" type="datetimeFigureOut">
               <a:rPr lang="ko-KR" altLang="en-US" smtClean="0"/>
-              <a:t>2025-06-01</a:t>
+              <a:t>2025-06-04</a:t>
             </a:fld>
             <a:endParaRPr lang="ko-KR" altLang="en-US"/>
           </a:p>
@@ -779,7 +779,7 @@
           <a:p>
             <a:fld id="{502CD248-AE16-47FA-AF5A-2F10FD8A8207}" type="datetimeFigureOut">
               <a:rPr lang="ko-KR" altLang="en-US" smtClean="0"/>
-              <a:t>2025-06-01</a:t>
+              <a:t>2025-06-04</a:t>
             </a:fld>
             <a:endParaRPr lang="ko-KR" altLang="en-US"/>
           </a:p>
@@ -977,7 +977,7 @@
           <a:p>
             <a:fld id="{502CD248-AE16-47FA-AF5A-2F10FD8A8207}" type="datetimeFigureOut">
               <a:rPr lang="ko-KR" altLang="en-US" smtClean="0"/>
-              <a:t>2025-06-01</a:t>
+              <a:t>2025-06-04</a:t>
             </a:fld>
             <a:endParaRPr lang="ko-KR" altLang="en-US"/>
           </a:p>
@@ -1185,7 +1185,7 @@
           <a:p>
             <a:fld id="{502CD248-AE16-47FA-AF5A-2F10FD8A8207}" type="datetimeFigureOut">
               <a:rPr lang="ko-KR" altLang="en-US" smtClean="0"/>
-              <a:t>2025-06-01</a:t>
+              <a:t>2025-06-04</a:t>
             </a:fld>
             <a:endParaRPr lang="ko-KR" altLang="en-US"/>
           </a:p>
@@ -1383,7 +1383,7 @@
           <a:p>
             <a:fld id="{502CD248-AE16-47FA-AF5A-2F10FD8A8207}" type="datetimeFigureOut">
               <a:rPr lang="ko-KR" altLang="en-US" smtClean="0"/>
-              <a:t>2025-06-01</a:t>
+              <a:t>2025-06-04</a:t>
             </a:fld>
             <a:endParaRPr lang="ko-KR" altLang="en-US"/>
           </a:p>
@@ -1658,7 +1658,7 @@
           <a:p>
             <a:fld id="{502CD248-AE16-47FA-AF5A-2F10FD8A8207}" type="datetimeFigureOut">
               <a:rPr lang="ko-KR" altLang="en-US" smtClean="0"/>
-              <a:t>2025-06-01</a:t>
+              <a:t>2025-06-04</a:t>
             </a:fld>
             <a:endParaRPr lang="ko-KR" altLang="en-US"/>
           </a:p>
@@ -1923,7 +1923,7 @@
           <a:p>
             <a:fld id="{502CD248-AE16-47FA-AF5A-2F10FD8A8207}" type="datetimeFigureOut">
               <a:rPr lang="ko-KR" altLang="en-US" smtClean="0"/>
-              <a:t>2025-06-01</a:t>
+              <a:t>2025-06-04</a:t>
             </a:fld>
             <a:endParaRPr lang="ko-KR" altLang="en-US"/>
           </a:p>
@@ -2335,7 +2335,7 @@
           <a:p>
             <a:fld id="{502CD248-AE16-47FA-AF5A-2F10FD8A8207}" type="datetimeFigureOut">
               <a:rPr lang="ko-KR" altLang="en-US" smtClean="0"/>
-              <a:t>2025-06-01</a:t>
+              <a:t>2025-06-04</a:t>
             </a:fld>
             <a:endParaRPr lang="ko-KR" altLang="en-US"/>
           </a:p>
@@ -2476,7 +2476,7 @@
           <a:p>
             <a:fld id="{502CD248-AE16-47FA-AF5A-2F10FD8A8207}" type="datetimeFigureOut">
               <a:rPr lang="ko-KR" altLang="en-US" smtClean="0"/>
-              <a:t>2025-06-01</a:t>
+              <a:t>2025-06-04</a:t>
             </a:fld>
             <a:endParaRPr lang="ko-KR" altLang="en-US"/>
           </a:p>
@@ -2589,7 +2589,7 @@
           <a:p>
             <a:fld id="{502CD248-AE16-47FA-AF5A-2F10FD8A8207}" type="datetimeFigureOut">
               <a:rPr lang="ko-KR" altLang="en-US" smtClean="0"/>
-              <a:t>2025-06-01</a:t>
+              <a:t>2025-06-04</a:t>
             </a:fld>
             <a:endParaRPr lang="ko-KR" altLang="en-US"/>
           </a:p>
@@ -2900,7 +2900,7 @@
           <a:p>
             <a:fld id="{502CD248-AE16-47FA-AF5A-2F10FD8A8207}" type="datetimeFigureOut">
               <a:rPr lang="ko-KR" altLang="en-US" smtClean="0"/>
-              <a:t>2025-06-01</a:t>
+              <a:t>2025-06-04</a:t>
             </a:fld>
             <a:endParaRPr lang="ko-KR" altLang="en-US"/>
           </a:p>
@@ -3188,7 +3188,7 @@
           <a:p>
             <a:fld id="{502CD248-AE16-47FA-AF5A-2F10FD8A8207}" type="datetimeFigureOut">
               <a:rPr lang="ko-KR" altLang="en-US" smtClean="0"/>
-              <a:t>2025-06-01</a:t>
+              <a:t>2025-06-04</a:t>
             </a:fld>
             <a:endParaRPr lang="ko-KR" altLang="en-US"/>
           </a:p>
@@ -3429,7 +3429,7 @@
           <a:p>
             <a:fld id="{502CD248-AE16-47FA-AF5A-2F10FD8A8207}" type="datetimeFigureOut">
               <a:rPr lang="ko-KR" altLang="en-US" smtClean="0"/>
-              <a:t>2025-06-01</a:t>
+              <a:t>2025-06-04</a:t>
             </a:fld>
             <a:endParaRPr lang="ko-KR" altLang="en-US"/>
           </a:p>
@@ -5339,7 +5339,7 @@
         </p:nvSpPr>
         <p:spPr>
           <a:xfrm>
-            <a:off x="4606904" y="3088441"/>
+            <a:off x="4606908" y="3992331"/>
             <a:ext cx="7246821" cy="369332"/>
           </a:xfrm>
           <a:prstGeom prst="rect">
